--- a/Planning docs/Slides/lesson-24-2-teacher-slides.pptx
+++ b/Planning docs/Slides/lesson-24-2-teacher-slides.pptx
@@ -4980,7 +4980,7 @@
                 <a:ea typeface="Calibri" pitchFamily="34" charset="-122"/>
                 <a:cs typeface="Calibri" pitchFamily="34" charset="-120"/>
               </a:rPr>
-              <a:t>•  Explaining facts in your own words</a:t>
+              <a:t>•  The article says chivalry was 'more of an ideal than a reality.' What does this mean — and can you think of a modern example of an ideal that people don't always live up to?</a:t>
             </a:r>
             <a:endParaRPr lang="en-US" sz="1500" dirty="0"/>
           </a:p>
@@ -4997,24 +4997,7 @@
                 <a:ea typeface="Calibri" pitchFamily="34" charset="-122"/>
                 <a:cs typeface="Calibri" pitchFamily="34" charset="-120"/>
               </a:rPr>
-              <a:t>•  Which words here are real English? Which are invented? How can you tell what the invented ones are doing?</a:t>
-            </a:r>
-            <a:endParaRPr lang="en-US" sz="1500" dirty="0"/>
-          </a:p>
-          <a:p>
-            <a:pPr indent="0" marL="0">
-              <a:buNone/>
-            </a:pPr>
-            <a:r>
-              <a:rPr lang="en-US" sz="1500" dirty="0">
-                <a:solidFill>
-                  <a:srgbClr val="1E293B"/>
-                </a:solidFill>
-                <a:latin typeface="Calibri" pitchFamily="34" charset="0"/>
-                <a:ea typeface="Calibri" pitchFamily="34" charset="-122"/>
-                <a:cs typeface="Calibri" pitchFamily="34" charset="-120"/>
-              </a:rPr>
-              <a:t>•  Look at the letters around the dot in each word. Count: vowel, consonant, consonant, vowel. That's the VCCV pattern .</a:t>
+              <a:t>•  The article describes the sequence: page → squire → knight. How long does the whole process take, based on the clues in the text?</a:t>
             </a:r>
             <a:endParaRPr lang="en-US" sz="1500" dirty="0"/>
           </a:p>
